--- a/Aula02/Aula2.pptx
+++ b/Aula02/Aula2.pptx
@@ -5,10 +5,10 @@
     <p:sldMasterId id="2147483666" r:id="rId4"/>
   </p:sldMasterIdLst>
   <p:notesMasterIdLst>
-    <p:notesMasterId r:id="rId13"/>
+    <p:notesMasterId r:id="rId14"/>
   </p:notesMasterIdLst>
   <p:handoutMasterIdLst>
-    <p:handoutMasterId r:id="rId14"/>
+    <p:handoutMasterId r:id="rId15"/>
   </p:handoutMasterIdLst>
   <p:sldIdLst>
     <p:sldId id="256" r:id="rId5"/>
@@ -18,7 +18,8 @@
     <p:sldId id="306" r:id="rId9"/>
     <p:sldId id="307" r:id="rId10"/>
     <p:sldId id="262" r:id="rId11"/>
-    <p:sldId id="276" r:id="rId12"/>
+    <p:sldId id="308" r:id="rId12"/>
+    <p:sldId id="276" r:id="rId13"/>
   </p:sldIdLst>
   <p:sldSz cx="12192000" cy="6858000"/>
   <p:notesSz cx="6858000" cy="9144000"/>
@@ -2882,6 +2883,115 @@
   <p:cSld>
     <p:spTree>
       <p:nvGrpSpPr>
+        <p:cNvPr id="1" name="">
+          <a:extLst>
+            <a:ext uri="{FF2B5EF4-FFF2-40B4-BE49-F238E27FC236}">
+              <a16:creationId xmlns:a16="http://schemas.microsoft.com/office/drawing/2014/main" id="{A056351E-954D-AF46-D72E-26B0B245F44D}"/>
+            </a:ext>
+          </a:extLst>
+        </p:cNvPr>
+        <p:cNvGrpSpPr/>
+        <p:nvPr/>
+      </p:nvGrpSpPr>
+      <p:grpSpPr>
+        <a:xfrm>
+          <a:off x="0" y="0"/>
+          <a:ext cx="0" cy="0"/>
+          <a:chOff x="0" y="0"/>
+          <a:chExt cx="0" cy="0"/>
+        </a:xfrm>
+      </p:grpSpPr>
+      <p:sp>
+        <p:nvSpPr>
+          <p:cNvPr id="2" name="Espaço Reservado para Imagem de Slide 1">
+            <a:extLst>
+              <a:ext uri="{FF2B5EF4-FFF2-40B4-BE49-F238E27FC236}">
+                <a16:creationId xmlns:a16="http://schemas.microsoft.com/office/drawing/2014/main" id="{F145CCED-F181-3525-0794-90546BD92998}"/>
+              </a:ext>
+            </a:extLst>
+          </p:cNvPr>
+          <p:cNvSpPr>
+            <a:spLocks noGrp="1" noRot="1" noChangeAspect="1"/>
+          </p:cNvSpPr>
+          <p:nvPr>
+            <p:ph type="sldImg"/>
+          </p:nvPr>
+        </p:nvSpPr>
+        <p:spPr/>
+      </p:sp>
+      <p:sp>
+        <p:nvSpPr>
+          <p:cNvPr id="3" name="Espaço Reservado para Anotações 2">
+            <a:extLst>
+              <a:ext uri="{FF2B5EF4-FFF2-40B4-BE49-F238E27FC236}">
+                <a16:creationId xmlns:a16="http://schemas.microsoft.com/office/drawing/2014/main" id="{A30EBC36-8E09-630C-5D96-C8D61FA782EE}"/>
+              </a:ext>
+            </a:extLst>
+          </p:cNvPr>
+          <p:cNvSpPr>
+            <a:spLocks noGrp="1"/>
+          </p:cNvSpPr>
+          <p:nvPr>
+            <p:ph type="body" idx="1"/>
+          </p:nvPr>
+        </p:nvSpPr>
+        <p:spPr/>
+        <p:txBody>
+          <a:bodyPr/>
+          <a:lstStyle/>
+          <a:p>
+            <a:endParaRPr lang="pt-BR"/>
+          </a:p>
+        </p:txBody>
+      </p:sp>
+      <p:sp>
+        <p:nvSpPr>
+          <p:cNvPr id="4" name="Espaço Reservado para Número de Slide 3">
+            <a:extLst>
+              <a:ext uri="{FF2B5EF4-FFF2-40B4-BE49-F238E27FC236}">
+                <a16:creationId xmlns:a16="http://schemas.microsoft.com/office/drawing/2014/main" id="{4A731205-776F-8F08-DD29-0E66F5E8B5A5}"/>
+              </a:ext>
+            </a:extLst>
+          </p:cNvPr>
+          <p:cNvSpPr>
+            <a:spLocks noGrp="1"/>
+          </p:cNvSpPr>
+          <p:nvPr>
+            <p:ph type="sldNum" sz="quarter" idx="5"/>
+          </p:nvPr>
+        </p:nvSpPr>
+        <p:spPr/>
+        <p:txBody>
+          <a:bodyPr/>
+          <a:lstStyle/>
+          <a:p>
+            <a:pPr rtl="0"/>
+            <a:fld id="{D4B9A9E5-4F7F-4A7D-9DE1-899232329269}" type="slidenum">
+              <a:rPr lang="pt-BR" smtClean="0"/>
+              <a:t>8</a:t>
+            </a:fld>
+            <a:endParaRPr lang="pt-BR"/>
+          </a:p>
+        </p:txBody>
+      </p:sp>
+    </p:spTree>
+    <p:extLst>
+      <p:ext uri="{BB962C8B-B14F-4D97-AF65-F5344CB8AC3E}">
+        <p14:creationId xmlns:p14="http://schemas.microsoft.com/office/powerpoint/2010/main" val="2294411922"/>
+      </p:ext>
+    </p:extLst>
+  </p:cSld>
+  <p:clrMapOvr>
+    <a:masterClrMapping/>
+  </p:clrMapOvr>
+</p:notes>
+</file>
+
+<file path=ppt/notesSlides/notesSlide9.xml><?xml version="1.0" encoding="utf-8"?>
+<p:notes xmlns:a="http://schemas.openxmlformats.org/drawingml/2006/main" xmlns:r="http://schemas.openxmlformats.org/officeDocument/2006/relationships" xmlns:p="http://schemas.openxmlformats.org/presentationml/2006/main">
+  <p:cSld>
+    <p:spTree>
+      <p:nvGrpSpPr>
         <p:cNvPr id="1" name=""/>
         <p:cNvGrpSpPr/>
         <p:nvPr/>
@@ -2944,7 +3054,7 @@
             <a:pPr rtl="0"/>
             <a:fld id="{D4B9A9E5-4F7F-4A7D-9DE1-899232329269}" type="slidenum">
               <a:rPr lang="pt-BR" smtClean="0"/>
-              <a:t>8</a:t>
+              <a:t>9</a:t>
             </a:fld>
             <a:endParaRPr lang="pt-BR"/>
           </a:p>
@@ -19973,6 +20083,258 @@
   <p:cSld>
     <p:spTree>
       <p:nvGrpSpPr>
+        <p:cNvPr id="1" name="">
+          <a:extLst>
+            <a:ext uri="{FF2B5EF4-FFF2-40B4-BE49-F238E27FC236}">
+              <a16:creationId xmlns:a16="http://schemas.microsoft.com/office/drawing/2014/main" id="{01ACFAB7-7386-4041-3B87-46C457E0AB67}"/>
+            </a:ext>
+          </a:extLst>
+        </p:cNvPr>
+        <p:cNvGrpSpPr/>
+        <p:nvPr/>
+      </p:nvGrpSpPr>
+      <p:grpSpPr>
+        <a:xfrm>
+          <a:off x="0" y="0"/>
+          <a:ext cx="0" cy="0"/>
+          <a:chOff x="0" y="0"/>
+          <a:chExt cx="0" cy="0"/>
+        </a:xfrm>
+      </p:grpSpPr>
+      <p:sp>
+        <p:nvSpPr>
+          <p:cNvPr id="2" name="Título 1">
+            <a:extLst>
+              <a:ext uri="{FF2B5EF4-FFF2-40B4-BE49-F238E27FC236}">
+                <a16:creationId xmlns:a16="http://schemas.microsoft.com/office/drawing/2014/main" id="{978B9BC2-B198-7E6D-3CEA-5AB4BA702530}"/>
+              </a:ext>
+            </a:extLst>
+          </p:cNvPr>
+          <p:cNvSpPr>
+            <a:spLocks noGrp="1"/>
+          </p:cNvSpPr>
+          <p:nvPr>
+            <p:ph type="title"/>
+          </p:nvPr>
+        </p:nvSpPr>
+        <p:spPr>
+          <a:xfrm>
+            <a:off x="1885156" y="892177"/>
+            <a:ext cx="8421688" cy="1325563"/>
+          </a:xfrm>
+        </p:spPr>
+        <p:txBody>
+          <a:bodyPr rtlCol="0"/>
+          <a:lstStyle/>
+          <a:p>
+            <a:r>
+              <a:rPr lang="pt-BR" b="1" dirty="0"/>
+              <a:t>Checklist de UX</a:t>
+            </a:r>
+            <a:endParaRPr lang="pt-BR" dirty="0"/>
+          </a:p>
+        </p:txBody>
+      </p:sp>
+      <p:sp>
+        <p:nvSpPr>
+          <p:cNvPr id="82" name="Espaço Reservado para o Número do Slide 81">
+            <a:extLst>
+              <a:ext uri="{FF2B5EF4-FFF2-40B4-BE49-F238E27FC236}">
+                <a16:creationId xmlns:a16="http://schemas.microsoft.com/office/drawing/2014/main" id="{8D45E485-1834-C47C-020A-9A15CF0774A5}"/>
+              </a:ext>
+            </a:extLst>
+          </p:cNvPr>
+          <p:cNvSpPr>
+            <a:spLocks noGrp="1"/>
+          </p:cNvSpPr>
+          <p:nvPr>
+            <p:ph type="sldNum" sz="quarter" idx="22"/>
+          </p:nvPr>
+        </p:nvSpPr>
+        <p:spPr>
+          <a:xfrm>
+            <a:off x="8610600" y="6356350"/>
+            <a:ext cx="2743200" cy="365125"/>
+          </a:xfrm>
+        </p:spPr>
+        <p:txBody>
+          <a:bodyPr rtlCol="0"/>
+          <a:lstStyle/>
+          <a:p>
+            <a:pPr rtl="0"/>
+            <a:fld id="{B5CEABB6-07DC-46E8-9B57-56EC44A396E5}" type="slidenum">
+              <a:rPr lang="pt-BR" smtClean="0"/>
+              <a:pPr rtl="0"/>
+              <a:t>8</a:t>
+            </a:fld>
+            <a:endParaRPr lang="pt-BR"/>
+          </a:p>
+        </p:txBody>
+      </p:sp>
+      <p:sp>
+        <p:nvSpPr>
+          <p:cNvPr id="9" name="Espaço Reservado para Texto 8">
+            <a:extLst>
+              <a:ext uri="{FF2B5EF4-FFF2-40B4-BE49-F238E27FC236}">
+                <a16:creationId xmlns:a16="http://schemas.microsoft.com/office/drawing/2014/main" id="{3A58E384-3939-838B-7D76-7F8734E2BCC4}"/>
+              </a:ext>
+            </a:extLst>
+          </p:cNvPr>
+          <p:cNvSpPr>
+            <a:spLocks noGrp="1"/>
+          </p:cNvSpPr>
+          <p:nvPr>
+            <p:ph type="body" sz="quarter" idx="13"/>
+          </p:nvPr>
+        </p:nvSpPr>
+        <p:spPr>
+          <a:xfrm>
+            <a:off x="258792" y="1949571"/>
+            <a:ext cx="11749178" cy="4771904"/>
+          </a:xfrm>
+        </p:spPr>
+        <p:txBody>
+          <a:bodyPr>
+            <a:normAutofit fontScale="92500" lnSpcReduction="10000"/>
+          </a:bodyPr>
+          <a:lstStyle/>
+          <a:p>
+            <a:pPr algn="l"/>
+            <a:r>
+              <a:rPr lang="pt-BR" dirty="0"/>
+              <a:t>Empty State </a:t>
+            </a:r>
+            <a:r>
+              <a:rPr lang="pt-BR" sz="1200" dirty="0"/>
+              <a:t>(O que o usuário vê ao abrir a interface antes de qualquer ação: orienta, reduz dúvida e mostra como começar)</a:t>
+            </a:r>
+          </a:p>
+          <a:p>
+            <a:pPr algn="l"/>
+            <a:endParaRPr lang="pt-BR" dirty="0"/>
+          </a:p>
+          <a:p>
+            <a:pPr algn="l"/>
+            <a:r>
+              <a:rPr lang="pt-BR" dirty="0" err="1"/>
+              <a:t>Loading</a:t>
+            </a:r>
+            <a:r>
+              <a:rPr lang="pt-BR" dirty="0"/>
+              <a:t> State </a:t>
+            </a:r>
+            <a:r>
+              <a:rPr lang="pt-BR" sz="1200" dirty="0"/>
+              <a:t>(Como a interface comunica que a IA está processando e o que está acontecendo durante a espera)</a:t>
+            </a:r>
+          </a:p>
+          <a:p>
+            <a:pPr algn="l"/>
+            <a:endParaRPr lang="pt-BR" dirty="0"/>
+          </a:p>
+          <a:p>
+            <a:pPr algn="l"/>
+            <a:r>
+              <a:rPr lang="pt-BR" dirty="0"/>
+              <a:t>Confidence UI </a:t>
+            </a:r>
+            <a:r>
+              <a:rPr lang="pt-BR" sz="1200" dirty="0"/>
+              <a:t>(Como o grau de confiança, incerteza ou risco do resultado é apresentado de forma clara e acionável)</a:t>
+            </a:r>
+          </a:p>
+          <a:p>
+            <a:pPr algn="l"/>
+            <a:endParaRPr lang="pt-BR" dirty="0"/>
+          </a:p>
+          <a:p>
+            <a:pPr algn="l"/>
+            <a:r>
+              <a:rPr lang="pt-BR" dirty="0" err="1"/>
+              <a:t>Explainability</a:t>
+            </a:r>
+            <a:r>
+              <a:rPr lang="pt-BR" dirty="0"/>
+              <a:t> / Transparência </a:t>
+            </a:r>
+            <a:r>
+              <a:rPr lang="pt-BR" sz="1200" dirty="0"/>
+              <a:t>(Como a interface explica por que a IA chegou àquele resultado (processo, critérios ou sinais))</a:t>
+            </a:r>
+          </a:p>
+          <a:p>
+            <a:pPr algn="l"/>
+            <a:endParaRPr lang="pt-BR" dirty="0"/>
+          </a:p>
+          <a:p>
+            <a:pPr algn="l"/>
+            <a:r>
+              <a:rPr lang="pt-BR" dirty="0"/>
+              <a:t>Design para Latência </a:t>
+            </a:r>
+            <a:r>
+              <a:rPr lang="pt-BR" sz="1200" dirty="0"/>
+              <a:t>(Como a interface lida com esperas longas, múltiplas etapas e percepção de tempo do usuário)</a:t>
+            </a:r>
+          </a:p>
+          <a:p>
+            <a:pPr algn="l"/>
+            <a:endParaRPr lang="pt-BR" dirty="0"/>
+          </a:p>
+          <a:p>
+            <a:pPr algn="l"/>
+            <a:r>
+              <a:rPr lang="pt-BR" dirty="0" err="1"/>
+              <a:t>Sidebar</a:t>
+            </a:r>
+            <a:r>
+              <a:rPr lang="pt-BR" dirty="0"/>
+              <a:t> como painel de controle </a:t>
+            </a:r>
+            <a:r>
+              <a:rPr lang="pt-BR" sz="1200" dirty="0"/>
+              <a:t>(Onde ficam configurações que alteram o comportamento do sistema)</a:t>
+            </a:r>
+          </a:p>
+          <a:p>
+            <a:pPr algn="l"/>
+            <a:endParaRPr lang="pt-BR" dirty="0"/>
+          </a:p>
+          <a:p>
+            <a:pPr algn="l"/>
+            <a:r>
+              <a:rPr lang="pt-BR" dirty="0"/>
+              <a:t>Feedback humano </a:t>
+            </a:r>
+            <a:r>
+              <a:rPr lang="pt-BR" sz="1200" dirty="0"/>
+              <a:t>(Como o usuário pode confirmar, corrigir ou discordar da decisão da IA)</a:t>
+            </a:r>
+          </a:p>
+          <a:p>
+            <a:pPr algn="l"/>
+            <a:endParaRPr lang="pt-BR" dirty="0"/>
+          </a:p>
+        </p:txBody>
+      </p:sp>
+    </p:spTree>
+    <p:extLst>
+      <p:ext uri="{BB962C8B-B14F-4D97-AF65-F5344CB8AC3E}">
+        <p14:creationId xmlns:p14="http://schemas.microsoft.com/office/powerpoint/2010/main" val="2715342306"/>
+      </p:ext>
+    </p:extLst>
+  </p:cSld>
+  <p:clrMapOvr>
+    <a:masterClrMapping/>
+  </p:clrMapOvr>
+</p:sld>
+</file>
+
+<file path=ppt/slides/slide9.xml><?xml version="1.0" encoding="utf-8"?>
+<p:sld xmlns:a="http://schemas.openxmlformats.org/drawingml/2006/main" xmlns:r="http://schemas.openxmlformats.org/officeDocument/2006/relationships" xmlns:p="http://schemas.openxmlformats.org/presentationml/2006/main">
+  <p:cSld>
+    <p:spTree>
+      <p:nvGrpSpPr>
         <p:cNvPr id="1" name=""/>
         <p:cNvGrpSpPr/>
         <p:nvPr/>
@@ -20015,7 +20377,7 @@
             <a:fld id="{B5CEABB6-07DC-46E8-9B57-56EC44A396E5}" type="slidenum">
               <a:rPr lang="pt-BR" smtClean="0"/>
               <a:pPr rtl="0"/>
-              <a:t>8</a:t>
+              <a:t>9</a:t>
             </a:fld>
             <a:endParaRPr lang="pt-BR"/>
           </a:p>
@@ -20876,15 +21238,6 @@
 </file>
 
 <file path=customXml/item1.xml><?xml version="1.0" encoding="utf-8"?>
-<?mso-contentType ?>
-<FormTemplates xmlns="http://schemas.microsoft.com/sharepoint/v3/contenttype/forms">
-  <Display>DocumentLibraryForm</Display>
-  <Edit>DocumentLibraryForm</Edit>
-  <New>DocumentLibraryForm</New>
-</FormTemplates>
-</file>
-
-<file path=customXml/item2.xml><?xml version="1.0" encoding="utf-8"?>
 <p:properties xmlns:p="http://schemas.microsoft.com/office/2006/metadata/properties" xmlns:xsi="http://www.w3.org/2001/XMLSchema-instance" xmlns:pc="http://schemas.microsoft.com/office/infopath/2007/PartnerControls">
   <documentManagement>
     <_ip_UnifiedCompliancePolicyUIAction xmlns="http://schemas.microsoft.com/sharepoint/v3" xsi:nil="true"/>
@@ -20901,6 +21254,15 @@
     <MediaServiceKeyPoints xmlns="71af3243-3dd4-4a8d-8c0d-dd76da1f02a5" xsi:nil="true"/>
   </documentManagement>
 </p:properties>
+</file>
+
+<file path=customXml/item2.xml><?xml version="1.0" encoding="utf-8"?>
+<?mso-contentType ?>
+<FormTemplates xmlns="http://schemas.microsoft.com/sharepoint/v3/contenttype/forms">
+  <Display>DocumentLibraryForm</Display>
+  <Edit>DocumentLibraryForm</Edit>
+  <New>DocumentLibraryForm</New>
+</FormTemplates>
 </file>
 
 <file path=customXml/item3.xml><?xml version="1.0" encoding="utf-8"?>
@@ -21180,14 +21542,6 @@
 </file>
 
 <file path=customXml/itemProps1.xml><?xml version="1.0" encoding="utf-8"?>
-<ds:datastoreItem xmlns:ds="http://schemas.openxmlformats.org/officeDocument/2006/customXml" ds:itemID="{42BC90D6-94CF-42F7-AAC4-9CF6824C54D5}">
-  <ds:schemaRefs>
-    <ds:schemaRef ds:uri="http://schemas.microsoft.com/sharepoint/v3/contenttype/forms"/>
-  </ds:schemaRefs>
-</ds:datastoreItem>
-</file>
-
-<file path=customXml/itemProps2.xml><?xml version="1.0" encoding="utf-8"?>
 <ds:datastoreItem xmlns:ds="http://schemas.openxmlformats.org/officeDocument/2006/customXml" ds:itemID="{7F97B18F-50BC-4F30-8373-93489E845F83}">
   <ds:schemaRefs>
     <ds:schemaRef ds:uri="http://schemas.microsoft.com/office/2006/metadata/properties"/>
@@ -21195,6 +21549,14 @@
     <ds:schemaRef ds:uri="http://schemas.microsoft.com/sharepoint/v3"/>
     <ds:schemaRef ds:uri="71af3243-3dd4-4a8d-8c0d-dd76da1f02a5"/>
     <ds:schemaRef ds:uri="230e9df3-be65-4c73-a93b-d1236ebd677e"/>
+  </ds:schemaRefs>
+</ds:datastoreItem>
+</file>
+
+<file path=customXml/itemProps2.xml><?xml version="1.0" encoding="utf-8"?>
+<ds:datastoreItem xmlns:ds="http://schemas.openxmlformats.org/officeDocument/2006/customXml" ds:itemID="{42BC90D6-94CF-42F7-AAC4-9CF6824C54D5}">
+  <ds:schemaRefs>
+    <ds:schemaRef ds:uri="http://schemas.microsoft.com/sharepoint/v3/contenttype/forms"/>
   </ds:schemaRefs>
 </ds:datastoreItem>
 </file>
